--- a/ClassMaterials/UsingObjectsAndAPIs/Slides/Part2-JavaArrayLists.pptx
+++ b/ClassMaterials/UsingObjectsAndAPIs/Slides/Part2-JavaArrayLists.pptx
@@ -4564,7 +4564,7 @@
           </a:ln>
           <a:extLst>
             <a:ext uri="{C572A759-6A51-4108-AA02-DFA0A04FC94B}">
-              <ma14:wrappingTextBoxFlag xmlns="" xmlns:ma14="http://schemas.microsoft.com/office/mac/drawingml/2011/main" val="1"/>
+              <ma14:wrappingTextBoxFlag xmlns:ma14="http://schemas.microsoft.com/office/mac/drawingml/2011/main" xmlns="" val="1"/>
             </a:ext>
           </a:extLst>
         </p:spPr>
@@ -4607,7 +4607,7 @@
           </a:ln>
           <a:extLst>
             <a:ext uri="{C572A759-6A51-4108-AA02-DFA0A04FC94B}">
-              <ma14:wrappingTextBoxFlag xmlns="" xmlns:ma14="http://schemas.microsoft.com/office/mac/drawingml/2011/main" val="1"/>
+              <ma14:wrappingTextBoxFlag xmlns:ma14="http://schemas.microsoft.com/office/mac/drawingml/2011/main" xmlns="" val="1"/>
             </a:ext>
           </a:extLst>
         </p:spPr>
@@ -5096,7 +5096,7 @@
           </a:ln>
           <a:extLst>
             <a:ext uri="{C572A759-6A51-4108-AA02-DFA0A04FC94B}">
-              <ma14:wrappingTextBoxFlag xmlns="" xmlns:ma14="http://schemas.microsoft.com/office/mac/drawingml/2011/main" val="1"/>
+              <ma14:wrappingTextBoxFlag xmlns:ma14="http://schemas.microsoft.com/office/mac/drawingml/2011/main" xmlns="" val="1"/>
             </a:ext>
           </a:extLst>
         </p:spPr>
@@ -8120,7 +8120,7 @@
             </a:r>
             <a:r>
               <a:rPr lang="en-US" dirty="0" err="1"/>
-              <a:t>HWSmallProblems</a:t>
+              <a:t>HWStringsAndLists</a:t>
             </a:r>
             <a:endParaRPr lang="en-US" dirty="0"/>
           </a:p>
